--- a/classes/parte-5-explotacion-de-sistemas-y-binarios/136-fuzzing-con-afl-y-libfuzzer/clase-136-presentacion.pptx
+++ b/classes/parte-5-explotacion-de-sistemas-y-binarios/136-fuzzing-con-afl-y-libfuzzer/clase-136-presentacion.pptx
@@ -17,6 +17,8 @@
     <p:sldId id="265" r:id="rId16"/>
     <p:sldId id="266" r:id="rId17"/>
     <p:sldId id="267" r:id="rId18"/>
+    <p:sldId id="268" r:id="rId19"/>
+    <p:sldId id="269" r:id="rId20"/>
   </p:sldIdLst>
   <p:sldSz cx="9144000" cy="6858000" type="screen4x3"/>
   <p:notesSz cx="6858000" cy="9144000"/>
@@ -3198,7 +3200,7 @@
                   <a:srgbClr val="0B3D2E"/>
                 </a:solidFill>
               </a:rPr>
-              <a:t>⚠️ Errores comunes</a:t>
+              <a:t>📝 Reto verificable</a:t>
             </a:r>
           </a:p>
         </p:txBody>
@@ -3236,67 +3238,52 @@
                   <a:srgbClr val="22282E"/>
                 </a:solidFill>
               </a:rPr>
-              <a:t>•  0 crashes tras horas — Corpus/diccionario pobres; el fuzzer no supera un check</a:t>
-            </a:r>
-          </a:p>
-          <a:p>
-            <a:pPr>
-              <a:spcAft>
-                <a:spcPts val="600"/>
-              </a:spcAft>
-            </a:pPr>
-            <a:r>
-              <a:rPr sz="1500">
-                <a:solidFill>
-                  <a:srgbClr val="22282E"/>
-                </a:solidFill>
-              </a:rPr>
-              <a:t>•  "suboptimal, core dumps" — Ajusta corepattern como indica AFL al arrancar</a:t>
-            </a:r>
-          </a:p>
-          <a:p>
-            <a:pPr>
-              <a:spcAft>
-                <a:spcPts val="600"/>
-              </a:spcAft>
-            </a:pPr>
-            <a:r>
-              <a:rPr sz="1500">
-                <a:solidFill>
-                  <a:srgbClr val="22282E"/>
-                </a:solidFill>
-              </a:rPr>
-              <a:t>•  Crashes no reproducibles — Falta ASan o hay no-determinismo (tiempo/aleatorio)</a:t>
-            </a:r>
-          </a:p>
-          <a:p>
-            <a:pPr>
-              <a:spcAft>
-                <a:spcPts val="600"/>
-              </a:spcAft>
-            </a:pPr>
-            <a:r>
-              <a:rPr sz="1500">
-                <a:solidFill>
-                  <a:srgbClr val="22282E"/>
-                </a:solidFill>
-              </a:rPr>
-              <a:t>•  Muy pocas ejec/seg — Objetivo lento; usa modo persistente/in-process</a:t>
-            </a:r>
-          </a:p>
-          <a:p>
-            <a:pPr>
-              <a:spcAft>
-                <a:spcPts val="600"/>
-              </a:spcAft>
-            </a:pPr>
-            <a:r>
-              <a:rPr sz="1500">
-                <a:solidFill>
-                  <a:srgbClr val="22282E"/>
-                </a:solidFill>
-              </a:rPr>
-              <a:t>•  Todos los crashes iguales — Falta dedup; usa triage por backtrace/casr</a:t>
+              <a:t>•  Encuentra y reproduce un crash en un objetivo instrumentado, minimiza el caso y explica la causa raíz</a:t>
+            </a:r>
+          </a:p>
+          <a:p>
+            <a:pPr>
+              <a:spcAft>
+                <a:spcPts val="600"/>
+              </a:spcAft>
+            </a:pPr>
+            <a:r>
+              <a:rPr sz="1500">
+                <a:solidFill>
+                  <a:srgbClr val="22282E"/>
+                </a:solidFill>
+              </a:rPr>
+              <a:t>•  con el backtrace de ASan.</a:t>
+            </a:r>
+          </a:p>
+          <a:p>
+            <a:pPr>
+              <a:spcAft>
+                <a:spcPts val="600"/>
+              </a:spcAft>
+            </a:pPr>
+            <a:r>
+              <a:rPr sz="1500">
+                <a:solidFill>
+                  <a:srgbClr val="22282E"/>
+                </a:solidFill>
+              </a:rPr>
+              <a:t>•  Criterio de aceptación: entregas un input mínimo que provoca el crash de forma determinista y el</a:t>
+            </a:r>
+          </a:p>
+          <a:p>
+            <a:pPr>
+              <a:spcAft>
+                <a:spcPts val="600"/>
+              </a:spcAft>
+            </a:pPr>
+            <a:r>
+              <a:rPr sz="1500">
+                <a:solidFill>
+                  <a:srgbClr val="22282E"/>
+                </a:solidFill>
+              </a:rPr>
+              <a:t>•  reporte de ASan que identifica el tipo de bug (p. ej. stack-buffer-overflow).</a:t>
             </a:r>
           </a:p>
         </p:txBody>
@@ -3347,7 +3334,7 @@
                   <a:srgbClr val="0B3D2E"/>
                 </a:solidFill>
               </a:rPr>
-              <a:t>❓ Preguntas frecuentes</a:t>
+              <a:t>⚠️ Errores comunes</a:t>
             </a:r>
           </a:p>
         </p:txBody>
@@ -3385,82 +3372,67 @@
                   <a:srgbClr val="22282E"/>
                 </a:solidFill>
               </a:rPr>
-              <a:t>•  ❓ ¿AFL++ o libFuzzer? AFL++ para binarios/CLI y black-box con QEMU; libFuzzer para funciones de</a:t>
-            </a:r>
-          </a:p>
-          <a:p>
-            <a:pPr>
-              <a:spcAft>
-                <a:spcPts val="600"/>
-              </a:spcAft>
-            </a:pPr>
-            <a:r>
-              <a:rPr sz="1500">
-                <a:solidFill>
-                  <a:srgbClr val="22282E"/>
-                </a:solidFill>
-              </a:rPr>
-              <a:t>•  librería in-process. A menudo se usan ambos.</a:t>
-            </a:r>
-          </a:p>
-          <a:p>
-            <a:pPr>
-              <a:spcAft>
-                <a:spcPts val="600"/>
-              </a:spcAft>
-            </a:pPr>
-            <a:r>
-              <a:rPr sz="1500">
-                <a:solidFill>
-                  <a:srgbClr val="22282E"/>
-                </a:solidFill>
-              </a:rPr>
-              <a:t>•  ❓ ¿Necesito el código fuente? No siempre: AFL++ tiene modo QEMU/frida para binarios sin fuente,</a:t>
-            </a:r>
-          </a:p>
-          <a:p>
-            <a:pPr>
-              <a:spcAft>
-                <a:spcPts val="600"/>
-              </a:spcAft>
-            </a:pPr>
-            <a:r>
-              <a:rPr sz="1500">
-                <a:solidFill>
-                  <a:srgbClr val="22282E"/>
-                </a:solidFill>
-              </a:rPr>
-              <a:t>•  aunque más lento.</a:t>
-            </a:r>
-          </a:p>
-          <a:p>
-            <a:pPr>
-              <a:spcAft>
-                <a:spcPts val="600"/>
-              </a:spcAft>
-            </a:pPr>
-            <a:r>
-              <a:rPr sz="1500">
-                <a:solidFill>
-                  <a:srgbClr val="22282E"/>
-                </a:solidFill>
-              </a:rPr>
-              <a:t>•  ❓ ¿Y si no hay crashes? Mejora semillas y diccionario, añade sanitizers y aumenta el tiempo;</a:t>
-            </a:r>
-          </a:p>
-          <a:p>
-            <a:pPr>
-              <a:spcAft>
-                <a:spcPts val="600"/>
-              </a:spcAft>
-            </a:pPr>
-            <a:r>
-              <a:rPr sz="1500">
-                <a:solidFill>
-                  <a:srgbClr val="22282E"/>
-                </a:solidFill>
-              </a:rPr>
-              <a:t>•  también considera assertions.</a:t>
+              <a:t>•  0 crashes tras horas — Corpus/diccionario pobres; el fuzzer no supera un check</a:t>
+            </a:r>
+          </a:p>
+          <a:p>
+            <a:pPr>
+              <a:spcAft>
+                <a:spcPts val="600"/>
+              </a:spcAft>
+            </a:pPr>
+            <a:r>
+              <a:rPr sz="1500">
+                <a:solidFill>
+                  <a:srgbClr val="22282E"/>
+                </a:solidFill>
+              </a:rPr>
+              <a:t>•  "suboptimal, core dumps" — Ajusta corepattern como indica AFL al arrancar</a:t>
+            </a:r>
+          </a:p>
+          <a:p>
+            <a:pPr>
+              <a:spcAft>
+                <a:spcPts val="600"/>
+              </a:spcAft>
+            </a:pPr>
+            <a:r>
+              <a:rPr sz="1500">
+                <a:solidFill>
+                  <a:srgbClr val="22282E"/>
+                </a:solidFill>
+              </a:rPr>
+              <a:t>•  Crashes no reproducibles — Falta ASan o hay no-determinismo (tiempo/aleatorio)</a:t>
+            </a:r>
+          </a:p>
+          <a:p>
+            <a:pPr>
+              <a:spcAft>
+                <a:spcPts val="600"/>
+              </a:spcAft>
+            </a:pPr>
+            <a:r>
+              <a:rPr sz="1500">
+                <a:solidFill>
+                  <a:srgbClr val="22282E"/>
+                </a:solidFill>
+              </a:rPr>
+              <a:t>•  Muy pocas ejec/seg — Objetivo lento; usa modo persistente/in-process</a:t>
+            </a:r>
+          </a:p>
+          <a:p>
+            <a:pPr>
+              <a:spcAft>
+                <a:spcPts val="600"/>
+              </a:spcAft>
+            </a:pPr>
+            <a:r>
+              <a:rPr sz="1500">
+                <a:solidFill>
+                  <a:srgbClr val="22282E"/>
+                </a:solidFill>
+              </a:rPr>
+              <a:t>•  Todos los crashes iguales — Falta dedup; usa triage por backtrace/casr</a:t>
             </a:r>
           </a:p>
         </p:txBody>
@@ -3511,7 +3483,7 @@
                   <a:srgbClr val="0B3D2E"/>
                 </a:solidFill>
               </a:rPr>
-              <a:t>🔗 Referencias</a:t>
+              <a:t>❓ Preguntas frecuentes</a:t>
             </a:r>
           </a:p>
         </p:txBody>
@@ -3549,6 +3521,170 @@
                   <a:srgbClr val="22282E"/>
                 </a:solidFill>
               </a:rPr>
+              <a:t>•  ❓ ¿AFL++ o libFuzzer? AFL++ para binarios/CLI y black-box con QEMU; libFuzzer para funciones de</a:t>
+            </a:r>
+          </a:p>
+          <a:p>
+            <a:pPr>
+              <a:spcAft>
+                <a:spcPts val="600"/>
+              </a:spcAft>
+            </a:pPr>
+            <a:r>
+              <a:rPr sz="1500">
+                <a:solidFill>
+                  <a:srgbClr val="22282E"/>
+                </a:solidFill>
+              </a:rPr>
+              <a:t>•  librería in-process. A menudo se usan ambos.</a:t>
+            </a:r>
+          </a:p>
+          <a:p>
+            <a:pPr>
+              <a:spcAft>
+                <a:spcPts val="600"/>
+              </a:spcAft>
+            </a:pPr>
+            <a:r>
+              <a:rPr sz="1500">
+                <a:solidFill>
+                  <a:srgbClr val="22282E"/>
+                </a:solidFill>
+              </a:rPr>
+              <a:t>•  ❓ ¿Necesito el código fuente? No siempre: AFL++ tiene modo QEMU/frida para binarios sin fuente,</a:t>
+            </a:r>
+          </a:p>
+          <a:p>
+            <a:pPr>
+              <a:spcAft>
+                <a:spcPts val="600"/>
+              </a:spcAft>
+            </a:pPr>
+            <a:r>
+              <a:rPr sz="1500">
+                <a:solidFill>
+                  <a:srgbClr val="22282E"/>
+                </a:solidFill>
+              </a:rPr>
+              <a:t>•  aunque más lento.</a:t>
+            </a:r>
+          </a:p>
+          <a:p>
+            <a:pPr>
+              <a:spcAft>
+                <a:spcPts val="600"/>
+              </a:spcAft>
+            </a:pPr>
+            <a:r>
+              <a:rPr sz="1500">
+                <a:solidFill>
+                  <a:srgbClr val="22282E"/>
+                </a:solidFill>
+              </a:rPr>
+              <a:t>•  ❓ ¿Y si no hay crashes? Mejora semillas y diccionario, añade sanitizers y aumenta el tiempo;</a:t>
+            </a:r>
+          </a:p>
+          <a:p>
+            <a:pPr>
+              <a:spcAft>
+                <a:spcPts val="600"/>
+              </a:spcAft>
+            </a:pPr>
+            <a:r>
+              <a:rPr sz="1500">
+                <a:solidFill>
+                  <a:srgbClr val="22282E"/>
+                </a:solidFill>
+              </a:rPr>
+              <a:t>•  también considera assertions.</a:t>
+            </a:r>
+          </a:p>
+        </p:txBody>
+      </p:sp>
+    </p:spTree>
+  </p:cSld>
+  <p:clrMapOvr>
+    <a:masterClrMapping/>
+  </p:clrMapOvr>
+</p:sld>
+</file>
+
+<file path=ppt/slides/slide13.xml><?xml version="1.0" encoding="utf-8"?>
+<p:sld xmlns:a="http://schemas.openxmlformats.org/drawingml/2006/main" xmlns:p="http://schemas.openxmlformats.org/presentationml/2006/main" xmlns:r="http://schemas.openxmlformats.org/officeDocument/2006/relationships">
+  <p:cSld>
+    <p:spTree>
+      <p:nvGrpSpPr>
+        <p:cNvPr id="1" name=""/>
+        <p:cNvGrpSpPr/>
+        <p:nvPr/>
+      </p:nvGrpSpPr>
+      <p:grpSpPr/>
+      <p:sp>
+        <p:nvSpPr>
+          <p:cNvPr id="2" name="TextBox 1"/>
+          <p:cNvSpPr txBox="1"/>
+          <p:nvPr/>
+        </p:nvSpPr>
+        <p:spPr>
+          <a:xfrm>
+            <a:off x="457200" y="320040"/>
+            <a:ext cx="8229600" cy="822960"/>
+          </a:xfrm>
+          <a:prstGeom prst="rect">
+            <a:avLst/>
+          </a:prstGeom>
+          <a:noFill/>
+        </p:spPr>
+        <p:txBody>
+          <a:bodyPr wrap="square">
+            <a:spAutoFit/>
+          </a:bodyPr>
+          <a:lstStyle/>
+          <a:p>
+            <a:r>
+              <a:rPr sz="2600" b="1">
+                <a:solidFill>
+                  <a:srgbClr val="0B3D2E"/>
+                </a:solidFill>
+              </a:rPr>
+              <a:t>🔗 Referencias</a:t>
+            </a:r>
+          </a:p>
+        </p:txBody>
+      </p:sp>
+      <p:sp>
+        <p:nvSpPr>
+          <p:cNvPr id="3" name="TextBox 2"/>
+          <p:cNvSpPr txBox="1"/>
+          <p:nvPr/>
+        </p:nvSpPr>
+        <p:spPr>
+          <a:xfrm>
+            <a:off x="457200" y="1280160"/>
+            <a:ext cx="8229600" cy="4937760"/>
+          </a:xfrm>
+          <a:prstGeom prst="rect">
+            <a:avLst/>
+          </a:prstGeom>
+          <a:noFill/>
+        </p:spPr>
+        <p:txBody>
+          <a:bodyPr wrap="square">
+            <a:spAutoFit/>
+          </a:bodyPr>
+          <a:lstStyle/>
+          <a:p>
+            <a:pPr>
+              <a:spcAft>
+                <a:spcPts val="600"/>
+              </a:spcAft>
+            </a:pPr>
+            <a:r>
+              <a:rPr sz="1500">
+                <a:solidFill>
+                  <a:srgbClr val="22282E"/>
+                </a:solidFill>
+              </a:rPr>
               <a:t>•  AFL++ — &lt;https://github.com/AFLplusplus/AFLplusplus&gt;</a:t>
             </a:r>
           </a:p>
@@ -3599,6 +3735,81 @@
           </a:p>
         </p:txBody>
       </p:sp>
+    </p:spTree>
+  </p:cSld>
+  <p:clrMapOvr>
+    <a:masterClrMapping/>
+  </p:clrMapOvr>
+</p:sld>
+</file>
+
+<file path=ppt/slides/slide14.xml><?xml version="1.0" encoding="utf-8"?>
+<p:sld xmlns:a="http://schemas.openxmlformats.org/drawingml/2006/main" xmlns:p="http://schemas.openxmlformats.org/presentationml/2006/main" xmlns:r="http://schemas.openxmlformats.org/officeDocument/2006/relationships">
+  <p:cSld>
+    <p:spTree>
+      <p:nvGrpSpPr>
+        <p:cNvPr id="1" name=""/>
+        <p:cNvGrpSpPr/>
+        <p:nvPr/>
+      </p:nvGrpSpPr>
+      <p:grpSpPr/>
+      <p:sp>
+        <p:nvSpPr>
+          <p:cNvPr id="2" name="TextBox 1"/>
+          <p:cNvSpPr txBox="1"/>
+          <p:nvPr/>
+        </p:nvSpPr>
+        <p:spPr>
+          <a:xfrm>
+            <a:off x="457200" y="274320"/>
+            <a:ext cx="8229600" cy="640080"/>
+          </a:xfrm>
+          <a:prstGeom prst="rect">
+            <a:avLst/>
+          </a:prstGeom>
+          <a:noFill/>
+        </p:spPr>
+        <p:txBody>
+          <a:bodyPr wrap="square">
+            <a:spAutoFit/>
+          </a:bodyPr>
+          <a:lstStyle/>
+          <a:p>
+            <a:r>
+              <a:rPr sz="2200" b="1">
+                <a:solidFill>
+                  <a:srgbClr val="0B3D2E"/>
+                </a:solidFill>
+              </a:rPr>
+              <a:t>Diagrama de la clase</a:t>
+            </a:r>
+          </a:p>
+        </p:txBody>
+      </p:sp>
+      <p:pic>
+        <p:nvPicPr>
+          <p:cNvPr id="3" name="Picture 2" descr="d968eb531a949eaf.png"/>
+          <p:cNvPicPr>
+            <a:picLocks noChangeAspect="1"/>
+          </p:cNvPicPr>
+          <p:nvPr/>
+        </p:nvPicPr>
+        <p:blipFill>
+          <a:blip r:embed="rId2"/>
+          <a:stretch>
+            <a:fillRect/>
+          </a:stretch>
+        </p:blipFill>
+        <p:spPr>
+          <a:xfrm>
+            <a:off x="457200" y="3255264"/>
+            <a:ext cx="8229600" cy="987552"/>
+          </a:xfrm>
+          <a:prstGeom prst="rect">
+            <a:avLst/>
+          </a:prstGeom>
+        </p:spPr>
+      </p:pic>
     </p:spTree>
   </p:cSld>
   <p:clrMapOvr>
@@ -4122,7 +4333,7 @@
                   <a:srgbClr val="0B3D2E"/>
                 </a:solidFill>
               </a:rPr>
-              <a:t>📖 Definiciones y características</a:t>
+              <a:t>🧠 Explicación en profundidad</a:t>
             </a:r>
           </a:p>
         </p:txBody>
@@ -4160,97 +4371,97 @@
                   <a:srgbClr val="22282E"/>
                 </a:solidFill>
               </a:rPr>
-              <a:t>•  Fuzzing: generación masiva de entradas para provocar fallos. Clave: el guiado por cobertura</a:t>
-            </a:r>
-          </a:p>
-          <a:p>
-            <a:pPr>
-              <a:spcAft>
-                <a:spcPts val="600"/>
-              </a:spcAft>
-            </a:pPr>
-            <a:r>
-              <a:rPr sz="1500">
-                <a:solidFill>
-                  <a:srgbClr val="22282E"/>
-                </a:solidFill>
-              </a:rPr>
-              <a:t>•  prioriza entradas que exploran código nuevo.</a:t>
-            </a:r>
-          </a:p>
-          <a:p>
-            <a:pPr>
-              <a:spcAft>
-                <a:spcPts val="600"/>
-              </a:spcAft>
-            </a:pPr>
-            <a:r>
-              <a:rPr sz="1500">
-                <a:solidFill>
-                  <a:srgbClr val="22282E"/>
-                </a:solidFill>
-              </a:rPr>
-              <a:t>•  Instrumentación de cobertura: el compilador inserta contadores por rama. Clave: AFL++ los usa</a:t>
-            </a:r>
-          </a:p>
-          <a:p>
-            <a:pPr>
-              <a:spcAft>
-                <a:spcPts val="600"/>
-              </a:spcAft>
-            </a:pPr>
-            <a:r>
-              <a:rPr sz="1500">
-                <a:solidFill>
-                  <a:srgbClr val="22282E"/>
-                </a:solidFill>
-              </a:rPr>
-              <a:t>•  para saber qué mutaciones son "interesantes".</a:t>
-            </a:r>
-          </a:p>
-          <a:p>
-            <a:pPr>
-              <a:spcAft>
-                <a:spcPts val="600"/>
-              </a:spcAft>
-            </a:pPr>
-            <a:r>
-              <a:rPr sz="1500">
-                <a:solidFill>
-                  <a:srgbClr val="22282E"/>
-                </a:solidFill>
-              </a:rPr>
-              <a:t>•  Corpus semilla: conjunto inicial de entradas válidas. Clave: acelera el descubrimiento al partir</a:t>
-            </a:r>
-          </a:p>
-          <a:p>
-            <a:pPr>
-              <a:spcAft>
-                <a:spcPts val="600"/>
-              </a:spcAft>
-            </a:pPr>
-            <a:r>
-              <a:rPr sz="1500">
-                <a:solidFill>
-                  <a:srgbClr val="22282E"/>
-                </a:solidFill>
-              </a:rPr>
-              <a:t>•  de casos realistas.</a:t>
-            </a:r>
-          </a:p>
-          <a:p>
-            <a:pPr>
-              <a:spcAft>
-                <a:spcPts val="600"/>
-              </a:spcAft>
-            </a:pPr>
-            <a:r>
-              <a:rPr sz="1500">
-                <a:solidFill>
-                  <a:srgbClr val="22282E"/>
-                </a:solidFill>
-              </a:rPr>
-              <a:t>•  Diccionario: lista de tokens/keywords del formato. Clave: ayuda a superar comprobaciones de</a:t>
+              <a:t>•  El fuzzing es la técnica automatizada más productiva para descubrir vulnerabilidades: consiste</a:t>
+            </a:r>
+          </a:p>
+          <a:p>
+            <a:pPr>
+              <a:spcAft>
+                <a:spcPts val="600"/>
+              </a:spcAft>
+            </a:pPr>
+            <a:r>
+              <a:rPr sz="1500">
+                <a:solidFill>
+                  <a:srgbClr val="22282E"/>
+                </a:solidFill>
+              </a:rPr>
+              <a:t>•  en alimentar un programa con enormes cantidades de entradas generadas automáticamente —muchas</a:t>
+            </a:r>
+          </a:p>
+          <a:p>
+            <a:pPr>
+              <a:spcAft>
+                <a:spcPts val="600"/>
+              </a:spcAft>
+            </a:pPr>
+            <a:r>
+              <a:rPr sz="1500">
+                <a:solidFill>
+                  <a:srgbClr val="22282E"/>
+                </a:solidFill>
+              </a:rPr>
+              <a:t>•  malformadas o aleatorias— y observar cuáles provocan un crash, porque un crash suele indicar un</a:t>
+            </a:r>
+          </a:p>
+          <a:p>
+            <a:pPr>
+              <a:spcAft>
+                <a:spcPts val="600"/>
+              </a:spcAft>
+            </a:pPr>
+            <a:r>
+              <a:rPr sz="1500">
+                <a:solidFill>
+                  <a:srgbClr val="22282E"/>
+                </a:solidFill>
+              </a:rPr>
+              <a:t>•  fallo de memoria (buffer overflow, UAF, integer overflow) potencialmente explotable. Su enorme valor</a:t>
+            </a:r>
+          </a:p>
+          <a:p>
+            <a:pPr>
+              <a:spcAft>
+                <a:spcPts val="600"/>
+              </a:spcAft>
+            </a:pPr>
+            <a:r>
+              <a:rPr sz="1500">
+                <a:solidFill>
+                  <a:srgbClr val="22282E"/>
+                </a:solidFill>
+              </a:rPr>
+              <a:t>•  está en que encuentra casos que un humano nunca probaría: entradas absurdas, tamaños extremos,</a:t>
+            </a:r>
+          </a:p>
+          <a:p>
+            <a:pPr>
+              <a:spcAft>
+                <a:spcPts val="600"/>
+              </a:spcAft>
+            </a:pPr>
+            <a:r>
+              <a:rPr sz="1500">
+                <a:solidFill>
+                  <a:srgbClr val="22282E"/>
+                </a:solidFill>
+              </a:rPr>
+              <a:t>•  combinaciones inesperadas. El fuzzing ha descubierto miles de vulnerabilidades en software crítico</a:t>
+            </a:r>
+          </a:p>
+          <a:p>
+            <a:pPr>
+              <a:spcAft>
+                <a:spcPts val="600"/>
+              </a:spcAft>
+            </a:pPr>
+            <a:r>
+              <a:rPr sz="1500">
+                <a:solidFill>
+                  <a:srgbClr val="22282E"/>
+                </a:solidFill>
+              </a:rPr>
+              <a:t>•  —navegadores, librerías de imágenes, parsers, kernels— y es hoy una parte estándar del desarrollo</a:t>
             </a:r>
           </a:p>
         </p:txBody>
@@ -4301,7 +4512,7 @@
                   <a:srgbClr val="0B3D2E"/>
                 </a:solidFill>
               </a:rPr>
-              <a:t>🧰 Herramientas y preparación</a:t>
+              <a:t>📖 Definiciones y características</a:t>
             </a:r>
           </a:p>
         </p:txBody>
@@ -4339,22 +4550,97 @@
                   <a:srgbClr val="22282E"/>
                 </a:solidFill>
               </a:rPr>
-              <a:t>•  sudo apt install -y afl++    # o compilar desde github.com/AFLplusplus/AFLplusplus</a:t>
-            </a:r>
-          </a:p>
-          <a:p>
-            <a:pPr>
-              <a:spcAft>
-                <a:spcPts val="600"/>
-              </a:spcAft>
-            </a:pPr>
-            <a:r>
-              <a:rPr sz="1500">
-                <a:solidFill>
-                  <a:srgbClr val="22282E"/>
-                </a:solidFill>
-              </a:rPr>
-              <a:t>•  clang --version</a:t>
+              <a:t>•  Fuzzing: generación masiva de entradas para provocar fallos. Clave: el guiado por cobertura</a:t>
+            </a:r>
+          </a:p>
+          <a:p>
+            <a:pPr>
+              <a:spcAft>
+                <a:spcPts val="600"/>
+              </a:spcAft>
+            </a:pPr>
+            <a:r>
+              <a:rPr sz="1500">
+                <a:solidFill>
+                  <a:srgbClr val="22282E"/>
+                </a:solidFill>
+              </a:rPr>
+              <a:t>•  prioriza entradas que exploran código nuevo.</a:t>
+            </a:r>
+          </a:p>
+          <a:p>
+            <a:pPr>
+              <a:spcAft>
+                <a:spcPts val="600"/>
+              </a:spcAft>
+            </a:pPr>
+            <a:r>
+              <a:rPr sz="1500">
+                <a:solidFill>
+                  <a:srgbClr val="22282E"/>
+                </a:solidFill>
+              </a:rPr>
+              <a:t>•  Instrumentación de cobertura: el compilador inserta contadores por rama. Clave: AFL++ los usa</a:t>
+            </a:r>
+          </a:p>
+          <a:p>
+            <a:pPr>
+              <a:spcAft>
+                <a:spcPts val="600"/>
+              </a:spcAft>
+            </a:pPr>
+            <a:r>
+              <a:rPr sz="1500">
+                <a:solidFill>
+                  <a:srgbClr val="22282E"/>
+                </a:solidFill>
+              </a:rPr>
+              <a:t>•  para saber qué mutaciones son "interesantes".</a:t>
+            </a:r>
+          </a:p>
+          <a:p>
+            <a:pPr>
+              <a:spcAft>
+                <a:spcPts val="600"/>
+              </a:spcAft>
+            </a:pPr>
+            <a:r>
+              <a:rPr sz="1500">
+                <a:solidFill>
+                  <a:srgbClr val="22282E"/>
+                </a:solidFill>
+              </a:rPr>
+              <a:t>•  Corpus semilla: conjunto inicial de entradas válidas. Clave: acelera el descubrimiento al partir</a:t>
+            </a:r>
+          </a:p>
+          <a:p>
+            <a:pPr>
+              <a:spcAft>
+                <a:spcPts val="600"/>
+              </a:spcAft>
+            </a:pPr>
+            <a:r>
+              <a:rPr sz="1500">
+                <a:solidFill>
+                  <a:srgbClr val="22282E"/>
+                </a:solidFill>
+              </a:rPr>
+              <a:t>•  de casos realistas.</a:t>
+            </a:r>
+          </a:p>
+          <a:p>
+            <a:pPr>
+              <a:spcAft>
+                <a:spcPts val="600"/>
+              </a:spcAft>
+            </a:pPr>
+            <a:r>
+              <a:rPr sz="1500">
+                <a:solidFill>
+                  <a:srgbClr val="22282E"/>
+                </a:solidFill>
+              </a:rPr>
+              <a:t>•  Diccionario: lista de tokens/keywords del formato. Clave: ayuda a superar comprobaciones de</a:t>
             </a:r>
           </a:p>
         </p:txBody>
@@ -4405,7 +4691,7 @@
                   <a:srgbClr val="0B3D2E"/>
                 </a:solidFill>
               </a:rPr>
-              <a:t>🧪 Laboratorio guiado</a:t>
+              <a:t>📔 Glosario</a:t>
             </a:r>
           </a:p>
         </p:txBody>
@@ -4443,97 +4729,97 @@
                   <a:srgbClr val="22282E"/>
                 </a:solidFill>
               </a:rPr>
-              <a:t>•  Objetivo vulnerable parser.c (tiene un overflow deliberado):</a:t>
-            </a:r>
-          </a:p>
-          <a:p>
-            <a:pPr>
-              <a:spcAft>
-                <a:spcPts val="600"/>
-              </a:spcAft>
-            </a:pPr>
-            <a:r>
-              <a:rPr sz="1500">
-                <a:solidFill>
-                  <a:srgbClr val="22282E"/>
-                </a:solidFill>
-              </a:rPr>
-              <a:t>•  void parse(const char s){ char b[16]; if(s[0]=='F' &amp;&amp; s[1]=='U') strcpy(b, s); }</a:t>
-            </a:r>
-          </a:p>
-          <a:p>
-            <a:pPr>
-              <a:spcAft>
-                <a:spcPts val="600"/>
-              </a:spcAft>
-            </a:pPr>
-            <a:r>
-              <a:rPr sz="1500">
-                <a:solidFill>
-                  <a:srgbClr val="22282E"/>
-                </a:solidFill>
-              </a:rPr>
-              <a:t>•  int main(int c, charv){ char buf[256]; FILEf=fopen(v[1],"rb"); int n=fread(buf,1,255,f); buf[n]=0; parse(buf); }</a:t>
-            </a:r>
-          </a:p>
-          <a:p>
-            <a:pPr>
-              <a:spcAft>
-                <a:spcPts val="600"/>
-              </a:spcAft>
-            </a:pPr>
-            <a:r>
-              <a:rPr sz="1500">
-                <a:solidFill>
-                  <a:srgbClr val="22282E"/>
-                </a:solidFill>
-              </a:rPr>
-              <a:t>•  Compila con instrumentación AFL++ + ASan y prepara el corpus:</a:t>
-            </a:r>
-          </a:p>
-          <a:p>
-            <a:pPr>
-              <a:spcAft>
-                <a:spcPts val="600"/>
-              </a:spcAft>
-            </a:pPr>
-            <a:r>
-              <a:rPr sz="1500">
-                <a:solidFill>
-                  <a:srgbClr val="22282E"/>
-                </a:solidFill>
-              </a:rPr>
-              <a:t>•  afl-cc -fsanitize=address -o parserafl parser.c</a:t>
-            </a:r>
-          </a:p>
-          <a:p>
-            <a:pPr>
-              <a:spcAft>
-                <a:spcPts val="600"/>
-              </a:spcAft>
-            </a:pPr>
-            <a:r>
-              <a:rPr sz="1500">
-                <a:solidFill>
-                  <a:srgbClr val="22282E"/>
-                </a:solidFill>
-              </a:rPr>
-              <a:t>•  mkdir in &amp;&amp; printf 'FUabc' &gt; in/seed</a:t>
-            </a:r>
-          </a:p>
-          <a:p>
-            <a:pPr>
-              <a:spcAft>
-                <a:spcPts val="600"/>
-              </a:spcAft>
-            </a:pPr>
-            <a:r>
-              <a:rPr sz="1500">
-                <a:solidFill>
-                  <a:srgbClr val="22282E"/>
-                </a:solidFill>
-              </a:rPr>
-              <a:t>•  afl-fuzz -i in -o out -- ./parserafl @@</a:t>
+              <a:t>•  Término — Definición concisa</a:t>
+            </a:r>
+          </a:p>
+          <a:p>
+            <a:pPr>
+              <a:spcAft>
+                <a:spcPts val="600"/>
+              </a:spcAft>
+            </a:pPr>
+            <a:r>
+              <a:rPr sz="1500">
+                <a:solidFill>
+                  <a:srgbClr val="22282E"/>
+                </a:solidFill>
+              </a:rPr>
+              <a:t>•  Fuzzing — Alimentar el programa con muchas entradas para provocar crashes</a:t>
+            </a:r>
+          </a:p>
+          <a:p>
+            <a:pPr>
+              <a:spcAft>
+                <a:spcPts val="600"/>
+              </a:spcAft>
+            </a:pPr>
+            <a:r>
+              <a:rPr sz="1500">
+                <a:solidFill>
+                  <a:srgbClr val="22282E"/>
+                </a:solidFill>
+              </a:rPr>
+              <a:t>•  Crash — Fallo que suele indicar una corrupción de memoria explotable</a:t>
+            </a:r>
+          </a:p>
+          <a:p>
+            <a:pPr>
+              <a:spcAft>
+                <a:spcPts val="600"/>
+              </a:spcAft>
+            </a:pPr>
+            <a:r>
+              <a:rPr sz="1500">
+                <a:solidFill>
+                  <a:srgbClr val="22282E"/>
+                </a:solidFill>
+              </a:rPr>
+              <a:t>•  Guiado por cobertura — El fuzzer usa qué código se ejecuta como brújula</a:t>
+            </a:r>
+          </a:p>
+          <a:p>
+            <a:pPr>
+              <a:spcAft>
+                <a:spcPts val="600"/>
+              </a:spcAft>
+            </a:pPr>
+            <a:r>
+              <a:rPr sz="1500">
+                <a:solidFill>
+                  <a:srgbClr val="22282E"/>
+                </a:solidFill>
+              </a:rPr>
+              <a:t>•  AFL / AFL++ — Fuzzer estándar guiado por cobertura</a:t>
+            </a:r>
+          </a:p>
+          <a:p>
+            <a:pPr>
+              <a:spcAft>
+                <a:spcPts val="600"/>
+              </a:spcAft>
+            </a:pPr>
+            <a:r>
+              <a:rPr sz="1500">
+                <a:solidFill>
+                  <a:srgbClr val="22282E"/>
+                </a:solidFill>
+              </a:rPr>
+              <a:t>•  Instrumentación — Añadir al binario el reporte de caminos ejecutados</a:t>
+            </a:r>
+          </a:p>
+          <a:p>
+            <a:pPr>
+              <a:spcAft>
+                <a:spcPts val="600"/>
+              </a:spcAft>
+            </a:pPr>
+            <a:r>
+              <a:rPr sz="1500">
+                <a:solidFill>
+                  <a:srgbClr val="22282E"/>
+                </a:solidFill>
+              </a:rPr>
+              <a:t>•  Camino nuevo — Entrada que alcanza código no visto; se guarda como semilla</a:t>
             </a:r>
           </a:p>
         </p:txBody>
@@ -4584,7 +4870,7 @@
                   <a:srgbClr val="0B3D2E"/>
                 </a:solidFill>
               </a:rPr>
-              <a:t>✍️ Ejercicios</a:t>
+              <a:t>🧪 Laboratorio guiado</a:t>
             </a:r>
           </a:p>
         </p:txBody>
@@ -4622,82 +4908,97 @@
                   <a:srgbClr val="22282E"/>
                 </a:solidFill>
               </a:rPr>
-              <a:t>•  Crea un corpus semilla mejor y mide el impacto en cobertura.</a:t>
-            </a:r>
-          </a:p>
-          <a:p>
-            <a:pPr>
-              <a:spcAft>
-                <a:spcPts val="600"/>
-              </a:spcAft>
-            </a:pPr>
-            <a:r>
-              <a:rPr sz="1500">
-                <a:solidFill>
-                  <a:srgbClr val="22282E"/>
-                </a:solidFill>
-              </a:rPr>
-              <a:t>•  Escribe un diccionario para un formato con magic bytes y compáralo sin él.</a:t>
-            </a:r>
-          </a:p>
-          <a:p>
-            <a:pPr>
-              <a:spcAft>
-                <a:spcPts val="600"/>
-              </a:spcAft>
-            </a:pPr>
-            <a:r>
-              <a:rPr sz="1500">
-                <a:solidFill>
-                  <a:srgbClr val="22282E"/>
-                </a:solidFill>
-              </a:rPr>
-              <a:t>•  Corre AFL++ en modo persistente y mide ejecuciones/seg.</a:t>
-            </a:r>
-          </a:p>
-          <a:p>
-            <a:pPr>
-              <a:spcAft>
-                <a:spcPts val="600"/>
-              </a:spcAft>
-            </a:pPr>
-            <a:r>
-              <a:rPr sz="1500">
-                <a:solidFill>
-                  <a:srgbClr val="22282E"/>
-                </a:solidFill>
-              </a:rPr>
-              <a:t>•  Tría tres crashes y determina si son el mismo bug.</a:t>
-            </a:r>
-          </a:p>
-          <a:p>
-            <a:pPr>
-              <a:spcAft>
-                <a:spcPts val="600"/>
-              </a:spcAft>
-            </a:pPr>
-            <a:r>
-              <a:rPr sz="1500">
-                <a:solidFill>
-                  <a:srgbClr val="22282E"/>
-                </a:solidFill>
-              </a:rPr>
-              <a:t>•  Minimiza un crash con afl-tmin y explica qué eliminó.</a:t>
-            </a:r>
-          </a:p>
-          <a:p>
-            <a:pPr>
-              <a:spcAft>
-                <a:spcPts val="600"/>
-              </a:spcAft>
-            </a:pPr>
-            <a:r>
-              <a:rPr sz="1500">
-                <a:solidFill>
-                  <a:srgbClr val="22282E"/>
-                </a:solidFill>
-              </a:rPr>
-              <a:t>•  Escribe un harness libFuzzer para una función de parsing propia.</a:t>
+              <a:t>•  Objetivo vulnerable parser.c (tiene un overflow deliberado):</a:t>
+            </a:r>
+          </a:p>
+          <a:p>
+            <a:pPr>
+              <a:spcAft>
+                <a:spcPts val="600"/>
+              </a:spcAft>
+            </a:pPr>
+            <a:r>
+              <a:rPr sz="1500">
+                <a:solidFill>
+                  <a:srgbClr val="22282E"/>
+                </a:solidFill>
+              </a:rPr>
+              <a:t>•  Compila con instrumentación AFL++ + ASan y prepara el corpus:</a:t>
+            </a:r>
+          </a:p>
+          <a:p>
+            <a:pPr>
+              <a:spcAft>
+                <a:spcPts val="600"/>
+              </a:spcAft>
+            </a:pPr>
+            <a:r>
+              <a:rPr sz="1500">
+                <a:solidFill>
+                  <a:srgbClr val="22282E"/>
+                </a:solidFill>
+              </a:rPr>
+              <a:t>•  Observa el panel de AFL++: paths, crashes únicos, ejecuciones/seg. En minutos deberían aparecer</a:t>
+            </a:r>
+          </a:p>
+          <a:p>
+            <a:pPr>
+              <a:spcAft>
+                <a:spcPts val="600"/>
+              </a:spcAft>
+            </a:pPr>
+            <a:r>
+              <a:rPr sz="1500">
+                <a:solidFill>
+                  <a:srgbClr val="22282E"/>
+                </a:solidFill>
+              </a:rPr>
+              <a:t>•  crashes en out/default/crashes/.</a:t>
+            </a:r>
+          </a:p>
+          <a:p>
+            <a:pPr>
+              <a:spcAft>
+                <a:spcPts val="600"/>
+              </a:spcAft>
+            </a:pPr>
+            <a:r>
+              <a:rPr sz="1500">
+                <a:solidFill>
+                  <a:srgbClr val="22282E"/>
+                </a:solidFill>
+              </a:rPr>
+              <a:t>•  Reproduce y tría un crash con ASan para ver el stack-buffer-overflow:</a:t>
+            </a:r>
+          </a:p>
+          <a:p>
+            <a:pPr>
+              <a:spcAft>
+                <a:spcPts val="600"/>
+              </a:spcAft>
+            </a:pPr>
+            <a:r>
+              <a:rPr sz="1500">
+                <a:solidFill>
+                  <a:srgbClr val="22282E"/>
+                </a:solidFill>
+              </a:rPr>
+              <a:t>•  Minimiza el caso: afl-tmin -i &lt;crash&gt; -o crashmin -- ./parserafl @@.</a:t>
+            </a:r>
+          </a:p>
+          <a:p>
+            <a:pPr>
+              <a:spcAft>
+                <a:spcPts val="600"/>
+              </a:spcAft>
+            </a:pPr>
+            <a:r>
+              <a:rPr sz="1500">
+                <a:solidFill>
+                  <a:srgbClr val="22282E"/>
+                </a:solidFill>
+              </a:rPr>
+              <a:t>•  Escribe un harness libFuzzer para la función parse:</a:t>
             </a:r>
           </a:p>
         </p:txBody>
@@ -4748,7 +5049,7 @@
                   <a:srgbClr val="0B3D2E"/>
                 </a:solidFill>
               </a:rPr>
-              <a:t>📝 Reto verificable</a:t>
+              <a:t>✍️ Ejercicios</a:t>
             </a:r>
           </a:p>
         </p:txBody>
@@ -4786,52 +5087,82 @@
                   <a:srgbClr val="22282E"/>
                 </a:solidFill>
               </a:rPr>
-              <a:t>•  Encuentra y reproduce un crash en un objetivo instrumentado, minimiza el caso y explica la causa raíz</a:t>
-            </a:r>
-          </a:p>
-          <a:p>
-            <a:pPr>
-              <a:spcAft>
-                <a:spcPts val="600"/>
-              </a:spcAft>
-            </a:pPr>
-            <a:r>
-              <a:rPr sz="1500">
-                <a:solidFill>
-                  <a:srgbClr val="22282E"/>
-                </a:solidFill>
-              </a:rPr>
-              <a:t>•  con el backtrace de ASan.</a:t>
-            </a:r>
-          </a:p>
-          <a:p>
-            <a:pPr>
-              <a:spcAft>
-                <a:spcPts val="600"/>
-              </a:spcAft>
-            </a:pPr>
-            <a:r>
-              <a:rPr sz="1500">
-                <a:solidFill>
-                  <a:srgbClr val="22282E"/>
-                </a:solidFill>
-              </a:rPr>
-              <a:t>•  Criterio de aceptación: entregas un input mínimo que provoca el crash de forma determinista y el</a:t>
-            </a:r>
-          </a:p>
-          <a:p>
-            <a:pPr>
-              <a:spcAft>
-                <a:spcPts val="600"/>
-              </a:spcAft>
-            </a:pPr>
-            <a:r>
-              <a:rPr sz="1500">
-                <a:solidFill>
-                  <a:srgbClr val="22282E"/>
-                </a:solidFill>
-              </a:rPr>
-              <a:t>•  reporte de ASan que identifica el tipo de bug (p. ej. stack-buffer-overflow).</a:t>
+              <a:t>•  Crea un corpus semilla mejor y mide el impacto en cobertura.</a:t>
+            </a:r>
+          </a:p>
+          <a:p>
+            <a:pPr>
+              <a:spcAft>
+                <a:spcPts val="600"/>
+              </a:spcAft>
+            </a:pPr>
+            <a:r>
+              <a:rPr sz="1500">
+                <a:solidFill>
+                  <a:srgbClr val="22282E"/>
+                </a:solidFill>
+              </a:rPr>
+              <a:t>•  Escribe un diccionario para un formato con magic bytes y compáralo sin él.</a:t>
+            </a:r>
+          </a:p>
+          <a:p>
+            <a:pPr>
+              <a:spcAft>
+                <a:spcPts val="600"/>
+              </a:spcAft>
+            </a:pPr>
+            <a:r>
+              <a:rPr sz="1500">
+                <a:solidFill>
+                  <a:srgbClr val="22282E"/>
+                </a:solidFill>
+              </a:rPr>
+              <a:t>•  Corre AFL++ en modo persistente y mide ejecuciones/seg.</a:t>
+            </a:r>
+          </a:p>
+          <a:p>
+            <a:pPr>
+              <a:spcAft>
+                <a:spcPts val="600"/>
+              </a:spcAft>
+            </a:pPr>
+            <a:r>
+              <a:rPr sz="1500">
+                <a:solidFill>
+                  <a:srgbClr val="22282E"/>
+                </a:solidFill>
+              </a:rPr>
+              <a:t>•  Tría tres crashes y determina si son el mismo bug.</a:t>
+            </a:r>
+          </a:p>
+          <a:p>
+            <a:pPr>
+              <a:spcAft>
+                <a:spcPts val="600"/>
+              </a:spcAft>
+            </a:pPr>
+            <a:r>
+              <a:rPr sz="1500">
+                <a:solidFill>
+                  <a:srgbClr val="22282E"/>
+                </a:solidFill>
+              </a:rPr>
+              <a:t>•  Minimiza un crash con afl-tmin y explica qué eliminó.</a:t>
+            </a:r>
+          </a:p>
+          <a:p>
+            <a:pPr>
+              <a:spcAft>
+                <a:spcPts val="600"/>
+              </a:spcAft>
+            </a:pPr>
+            <a:r>
+              <a:rPr sz="1500">
+                <a:solidFill>
+                  <a:srgbClr val="22282E"/>
+                </a:solidFill>
+              </a:rPr>
+              <a:t>•  Escribe un harness libFuzzer para una función de parsing propia.</a:t>
             </a:r>
           </a:p>
         </p:txBody>
